--- a/Prezentacija.pptx
+++ b/Prezentacija.pptx
@@ -262,7 +262,7 @@
   </p:defaultTextStyle>
   <p:extLst>
     <p:ext uri="GoogleSlidesCustomDataVersion2">
-      <go:slidesCustomData xmlns:go="http://customooxmlschemas.google.com/" r:id="rId20" roundtripDataSignature="AMtx7mi6G6zLJy2Deyi/X2/Wf9hNc1KuzA=="/>
+      <go:slidesCustomData xmlns:go="http://customooxmlschemas.google.com/" r:id="rId20" roundtripDataSignature="AMtx7mh6XfA/lTj9pShAcvzNqpKQ8MwwqA=="/>
     </p:ext>
   </p:extLst>
 </p:presentation>
@@ -1598,7 +1598,7 @@
   <p:cSld>
     <p:spTree>
       <p:nvGrpSpPr>
-        <p:cNvPr id="325" name="Shape 325"/>
+        <p:cNvPr id="316" name="Shape 316"/>
         <p:cNvGrpSpPr/>
         <p:nvPr/>
       </p:nvGrpSpPr>
@@ -1612,7 +1612,7 @@
       </p:grpSpPr>
       <p:sp>
         <p:nvSpPr>
-          <p:cNvPr id="326" name="Google Shape;326;p9:notes"/>
+          <p:cNvPr id="317" name="Google Shape;317;p9:notes"/>
           <p:cNvSpPr/>
           <p:nvPr>
             <p:ph idx="2" type="sldImg"/>
@@ -1657,7 +1657,7 @@
       </p:sp>
       <p:sp>
         <p:nvSpPr>
-          <p:cNvPr id="327" name="Google Shape;327;p9:notes"/>
+          <p:cNvPr id="318" name="Google Shape;318;p9:notes"/>
           <p:cNvSpPr txBox="1"/>
           <p:nvPr>
             <p:ph idx="1" type="body"/>
@@ -1700,7 +1700,7 @@
       </p:sp>
       <p:sp>
         <p:nvSpPr>
-          <p:cNvPr id="328" name="Google Shape;328;p9:notes"/>
+          <p:cNvPr id="319" name="Google Shape;319;p9:notes"/>
           <p:cNvSpPr txBox="1"/>
           <p:nvPr>
             <p:ph idx="12" type="sldNum"/>
@@ -1755,7 +1755,7 @@
   <p:cSld>
     <p:spTree>
       <p:nvGrpSpPr>
-        <p:cNvPr id="350" name="Shape 350"/>
+        <p:cNvPr id="341" name="Shape 341"/>
         <p:cNvGrpSpPr/>
         <p:nvPr/>
       </p:nvGrpSpPr>
@@ -1769,7 +1769,7 @@
       </p:grpSpPr>
       <p:sp>
         <p:nvSpPr>
-          <p:cNvPr id="351" name="Google Shape;351;g3c9beea2910_0_8:notes"/>
+          <p:cNvPr id="342" name="Google Shape;342;g3c9beea2910_0_8:notes"/>
           <p:cNvSpPr/>
           <p:nvPr>
             <p:ph idx="2" type="sldImg"/>
@@ -1814,7 +1814,7 @@
       </p:sp>
       <p:sp>
         <p:nvSpPr>
-          <p:cNvPr id="352" name="Google Shape;352;g3c9beea2910_0_8:notes"/>
+          <p:cNvPr id="343" name="Google Shape;343;g3c9beea2910_0_8:notes"/>
           <p:cNvSpPr txBox="1"/>
           <p:nvPr>
             <p:ph idx="1" type="body"/>
@@ -1857,7 +1857,7 @@
       </p:sp>
       <p:sp>
         <p:nvSpPr>
-          <p:cNvPr id="353" name="Google Shape;353;g3c9beea2910_0_8:notes"/>
+          <p:cNvPr id="344" name="Google Shape;344;g3c9beea2910_0_8:notes"/>
           <p:cNvSpPr txBox="1"/>
           <p:nvPr>
             <p:ph idx="12" type="sldNum"/>
@@ -6269,7 +6269,7 @@
     </p:bg>
     <p:spTree>
       <p:nvGrpSpPr>
-        <p:cNvPr id="329" name="Shape 329"/>
+        <p:cNvPr id="320" name="Shape 320"/>
         <p:cNvGrpSpPr/>
         <p:nvPr/>
       </p:nvGrpSpPr>
@@ -6283,7 +6283,7 @@
       </p:grpSpPr>
       <p:sp>
         <p:nvSpPr>
-          <p:cNvPr id="330" name="Google Shape;330;p9"/>
+          <p:cNvPr id="321" name="Google Shape;321;p9"/>
           <p:cNvSpPr/>
           <p:nvPr/>
         </p:nvSpPr>
@@ -6332,7 +6332,7 @@
       </p:sp>
       <p:sp>
         <p:nvSpPr>
-          <p:cNvPr id="331" name="Google Shape;331;p9"/>
+          <p:cNvPr id="322" name="Google Shape;322;p9"/>
           <p:cNvSpPr/>
           <p:nvPr/>
         </p:nvSpPr>
@@ -6381,7 +6381,7 @@
       </p:sp>
       <p:sp>
         <p:nvSpPr>
-          <p:cNvPr id="332" name="Google Shape;332;p9"/>
+          <p:cNvPr id="323" name="Google Shape;323;p9"/>
           <p:cNvSpPr/>
           <p:nvPr/>
         </p:nvSpPr>
@@ -6444,7 +6444,7 @@
       </p:sp>
       <p:sp>
         <p:nvSpPr>
-          <p:cNvPr id="333" name="Google Shape;333;p9"/>
+          <p:cNvPr id="324" name="Google Shape;324;p9"/>
           <p:cNvSpPr/>
           <p:nvPr/>
         </p:nvSpPr>
@@ -6500,7 +6500,7 @@
       </p:sp>
       <p:sp>
         <p:nvSpPr>
-          <p:cNvPr id="334" name="Google Shape;334;p9"/>
+          <p:cNvPr id="325" name="Google Shape;325;p9"/>
           <p:cNvSpPr/>
           <p:nvPr/>
         </p:nvSpPr>
@@ -6563,7 +6563,7 @@
       </p:sp>
       <p:sp>
         <p:nvSpPr>
-          <p:cNvPr id="335" name="Google Shape;335;p9"/>
+          <p:cNvPr id="326" name="Google Shape;326;p9"/>
           <p:cNvSpPr/>
           <p:nvPr/>
         </p:nvSpPr>
@@ -6626,7 +6626,7 @@
       </p:sp>
       <p:sp>
         <p:nvSpPr>
-          <p:cNvPr id="336" name="Google Shape;336;p9"/>
+          <p:cNvPr id="327" name="Google Shape;327;p9"/>
           <p:cNvSpPr/>
           <p:nvPr/>
         </p:nvSpPr>
@@ -6737,7 +6737,7 @@
       </p:sp>
       <p:sp>
         <p:nvSpPr>
-          <p:cNvPr id="337" name="Google Shape;337;p9"/>
+          <p:cNvPr id="328" name="Google Shape;328;p9"/>
           <p:cNvSpPr/>
           <p:nvPr/>
         </p:nvSpPr>
@@ -6793,7 +6793,7 @@
       </p:sp>
       <p:sp>
         <p:nvSpPr>
-          <p:cNvPr id="338" name="Google Shape;338;p9"/>
+          <p:cNvPr id="329" name="Google Shape;329;p9"/>
           <p:cNvSpPr/>
           <p:nvPr/>
         </p:nvSpPr>
@@ -6856,7 +6856,7 @@
       </p:sp>
       <p:sp>
         <p:nvSpPr>
-          <p:cNvPr id="339" name="Google Shape;339;p9"/>
+          <p:cNvPr id="330" name="Google Shape;330;p9"/>
           <p:cNvSpPr/>
           <p:nvPr/>
         </p:nvSpPr>
@@ -6919,7 +6919,7 @@
       </p:sp>
       <p:sp>
         <p:nvSpPr>
-          <p:cNvPr id="340" name="Google Shape;340;p9"/>
+          <p:cNvPr id="331" name="Google Shape;331;p9"/>
           <p:cNvSpPr/>
           <p:nvPr/>
         </p:nvSpPr>
@@ -6982,7 +6982,7 @@
       </p:sp>
       <p:sp>
         <p:nvSpPr>
-          <p:cNvPr id="341" name="Google Shape;341;p9"/>
+          <p:cNvPr id="332" name="Google Shape;332;p9"/>
           <p:cNvSpPr/>
           <p:nvPr/>
         </p:nvSpPr>
@@ -7038,7 +7038,7 @@
       </p:sp>
       <p:sp>
         <p:nvSpPr>
-          <p:cNvPr id="342" name="Google Shape;342;p9"/>
+          <p:cNvPr id="333" name="Google Shape;333;p9"/>
           <p:cNvSpPr/>
           <p:nvPr/>
         </p:nvSpPr>
@@ -7101,7 +7101,7 @@
       </p:sp>
       <p:sp>
         <p:nvSpPr>
-          <p:cNvPr id="343" name="Google Shape;343;p9"/>
+          <p:cNvPr id="334" name="Google Shape;334;p9"/>
           <p:cNvSpPr/>
           <p:nvPr/>
         </p:nvSpPr>
@@ -7164,7 +7164,7 @@
       </p:sp>
       <p:sp>
         <p:nvSpPr>
-          <p:cNvPr id="344" name="Google Shape;344;p9"/>
+          <p:cNvPr id="335" name="Google Shape;335;p9"/>
           <p:cNvSpPr/>
           <p:nvPr/>
         </p:nvSpPr>
@@ -7251,7 +7251,7 @@
       </p:sp>
       <p:sp>
         <p:nvSpPr>
-          <p:cNvPr id="345" name="Google Shape;345;p9"/>
+          <p:cNvPr id="336" name="Google Shape;336;p9"/>
           <p:cNvSpPr/>
           <p:nvPr/>
         </p:nvSpPr>
@@ -7307,7 +7307,7 @@
       </p:sp>
       <p:sp>
         <p:nvSpPr>
-          <p:cNvPr id="346" name="Google Shape;346;p9"/>
+          <p:cNvPr id="337" name="Google Shape;337;p9"/>
           <p:cNvSpPr/>
           <p:nvPr/>
         </p:nvSpPr>
@@ -7370,7 +7370,7 @@
       </p:sp>
       <p:sp>
         <p:nvSpPr>
-          <p:cNvPr id="347" name="Google Shape;347;p9"/>
+          <p:cNvPr id="338" name="Google Shape;338;p9"/>
           <p:cNvSpPr/>
           <p:nvPr/>
         </p:nvSpPr>
@@ -7433,7 +7433,7 @@
       </p:sp>
       <p:sp>
         <p:nvSpPr>
-          <p:cNvPr id="348" name="Google Shape;348;p9"/>
+          <p:cNvPr id="339" name="Google Shape;339;p9"/>
           <p:cNvSpPr/>
           <p:nvPr/>
         </p:nvSpPr>
@@ -7496,7 +7496,7 @@
       </p:sp>
       <p:sp>
         <p:nvSpPr>
-          <p:cNvPr id="349" name="Google Shape;349;p9"/>
+          <p:cNvPr id="340" name="Google Shape;340;p9"/>
           <p:cNvSpPr/>
           <p:nvPr/>
         </p:nvSpPr>
@@ -7577,7 +7577,7 @@
     </p:bg>
     <p:spTree>
       <p:nvGrpSpPr>
-        <p:cNvPr id="354" name="Shape 354"/>
+        <p:cNvPr id="345" name="Shape 345"/>
         <p:cNvGrpSpPr/>
         <p:nvPr/>
       </p:nvGrpSpPr>
@@ -7591,7 +7591,7 @@
       </p:grpSpPr>
       <p:sp>
         <p:nvSpPr>
-          <p:cNvPr id="355" name="Google Shape;355;g3c9beea2910_0_8"/>
+          <p:cNvPr id="346" name="Google Shape;346;g3c9beea2910_0_8"/>
           <p:cNvSpPr/>
           <p:nvPr/>
         </p:nvSpPr>
@@ -7640,7 +7640,7 @@
       </p:sp>
       <p:sp>
         <p:nvSpPr>
-          <p:cNvPr id="356" name="Google Shape;356;g3c9beea2910_0_8"/>
+          <p:cNvPr id="347" name="Google Shape;347;g3c9beea2910_0_8"/>
           <p:cNvSpPr/>
           <p:nvPr/>
         </p:nvSpPr>
@@ -7691,7 +7691,7 @@
       </p:sp>
       <p:sp>
         <p:nvSpPr>
-          <p:cNvPr id="357" name="Google Shape;357;g3c9beea2910_0_8"/>
+          <p:cNvPr id="348" name="Google Shape;348;g3c9beea2910_0_8"/>
           <p:cNvSpPr/>
           <p:nvPr/>
         </p:nvSpPr>
@@ -7882,7 +7882,7 @@
                 <a:cs typeface="Calibri"/>
                 <a:sym typeface="Calibri"/>
               </a:rPr>
-              <a:t>Uvod — Šta je Connect 4?</a:t>
+              <a:t>Uvod — Šta je 4 Connect?</a:t>
             </a:r>
             <a:endParaRPr b="0" i="0" sz="2800" u="none" cap="none" strike="noStrike">
               <a:solidFill>
@@ -10994,7 +10994,7 @@
                 <a:cs typeface="Calibri"/>
                 <a:sym typeface="Calibri"/>
               </a:rPr>
-              <a:t>Agent bira potez koji maksimizuje svoju procenu.</a:t>
+              <a:t>Agent bira potez kojim maksimizuje svoju procenu.</a:t>
             </a:r>
             <a:endParaRPr b="0" i="0" sz="1050" u="none" cap="none" strike="noStrike">
               <a:solidFill>
@@ -15609,19 +15609,7 @@
                 <a:cs typeface="Calibri"/>
                 <a:sym typeface="Calibri"/>
               </a:rPr>
-              <a:t>Alpha-beta pruning </a:t>
-            </a:r>
-            <a:r>
-              <a:rPr b="1" i="0" lang="en-US" sz="2800" u="none" cap="none" strike="noStrike">
-                <a:solidFill>
-                  <a:srgbClr val="1A1A2E"/>
-                </a:solidFill>
-                <a:latin typeface="Calibri"/>
-                <a:ea typeface="Calibri"/>
-                <a:cs typeface="Calibri"/>
-                <a:sym typeface="Calibri"/>
-              </a:rPr>
-              <a:t>algoritam</a:t>
+              <a:t>Alpha-beta Pruning</a:t>
             </a:r>
             <a:endParaRPr b="0" i="0" sz="2800" u="none" cap="none" strike="noStrike">
               <a:solidFill>
@@ -20758,644 +20746,9 @@
           </a:p>
         </p:txBody>
       </p:sp>
-      <p:sp>
-        <p:nvSpPr>
-          <p:cNvPr id="315" name="Google Shape;315;p7"/>
-          <p:cNvSpPr/>
-          <p:nvPr/>
-        </p:nvSpPr>
-        <p:spPr>
-          <a:xfrm>
-            <a:off x="5532120" y="960120"/>
-            <a:ext cx="3383280" cy="1234440"/>
-          </a:xfrm>
-          <a:prstGeom prst="rect">
-            <a:avLst/>
-          </a:prstGeom>
-          <a:solidFill>
-            <a:srgbClr val="1E2A4A"/>
-          </a:solidFill>
-          <a:ln cap="flat" cmpd="sng" w="19050">
-            <a:solidFill>
-              <a:srgbClr val="00D4AA"/>
-            </a:solidFill>
-            <a:prstDash val="solid"/>
-            <a:round/>
-            <a:headEnd len="sm" w="sm" type="none"/>
-            <a:tailEnd len="sm" w="sm" type="none"/>
-          </a:ln>
-        </p:spPr>
-        <p:txBody>
-          <a:bodyPr anchorCtr="0" anchor="ctr" bIns="91425" lIns="91425" spcFirstLastPara="1" rIns="91425" wrap="square" tIns="91425">
-            <a:noAutofit/>
-          </a:bodyPr>
-          <a:lstStyle/>
-          <a:p>
-            <a:pPr indent="0" lvl="0" marL="0" rtl="0" algn="l">
-              <a:spcBef>
-                <a:spcPts val="0"/>
-              </a:spcBef>
-              <a:spcAft>
-                <a:spcPts val="0"/>
-              </a:spcAft>
-              <a:buNone/>
-            </a:pPr>
-            <a:r>
-              <a:t/>
-            </a:r>
-            <a:endParaRPr/>
-          </a:p>
-        </p:txBody>
-      </p:sp>
-      <p:sp>
-        <p:nvSpPr>
-          <p:cNvPr id="316" name="Google Shape;316;p7"/>
-          <p:cNvSpPr/>
-          <p:nvPr/>
-        </p:nvSpPr>
-        <p:spPr>
-          <a:xfrm>
-            <a:off x="5577840" y="1051560"/>
-            <a:ext cx="1097280" cy="1005840"/>
-          </a:xfrm>
-          <a:prstGeom prst="rect">
-            <a:avLst/>
-          </a:prstGeom>
-          <a:noFill/>
-          <a:ln>
-            <a:noFill/>
-          </a:ln>
-        </p:spPr>
-        <p:txBody>
-          <a:bodyPr anchorCtr="0" anchor="ctr" bIns="45700" lIns="91425" spcFirstLastPara="1" rIns="91425" wrap="square" tIns="45700">
-            <a:noAutofit/>
-          </a:bodyPr>
-          <a:lstStyle/>
-          <a:p>
-            <a:pPr indent="0" lvl="0" marL="0" marR="0" rtl="0" algn="ctr">
-              <a:spcBef>
-                <a:spcPts val="0"/>
-              </a:spcBef>
-              <a:spcAft>
-                <a:spcPts val="0"/>
-              </a:spcAft>
-              <a:buClr>
-                <a:srgbClr val="00D4AA"/>
-              </a:buClr>
-              <a:buSzPts val="3600"/>
-              <a:buFont typeface="Calibri"/>
-              <a:buNone/>
-            </a:pPr>
-            <a:r>
-              <a:rPr b="1" i="0" lang="en-US" sz="3600" u="none" cap="none" strike="noStrike">
-                <a:solidFill>
-                  <a:srgbClr val="00D4AA"/>
-                </a:solidFill>
-                <a:latin typeface="Calibri"/>
-                <a:ea typeface="Calibri"/>
-                <a:cs typeface="Calibri"/>
-                <a:sym typeface="Calibri"/>
-              </a:rPr>
-              <a:t>~4×</a:t>
-            </a:r>
-            <a:endParaRPr b="0" i="0" sz="3600" u="none" cap="none" strike="noStrike">
-              <a:solidFill>
-                <a:schemeClr val="dk1"/>
-              </a:solidFill>
-              <a:latin typeface="Calibri"/>
-              <a:ea typeface="Calibri"/>
-              <a:cs typeface="Calibri"/>
-              <a:sym typeface="Calibri"/>
-            </a:endParaRPr>
-          </a:p>
-        </p:txBody>
-      </p:sp>
-      <p:sp>
-        <p:nvSpPr>
-          <p:cNvPr id="317" name="Google Shape;317;p7"/>
-          <p:cNvSpPr/>
-          <p:nvPr/>
-        </p:nvSpPr>
-        <p:spPr>
-          <a:xfrm>
-            <a:off x="6720840" y="1188720"/>
-            <a:ext cx="2103120" cy="777240"/>
-          </a:xfrm>
-          <a:prstGeom prst="rect">
-            <a:avLst/>
-          </a:prstGeom>
-          <a:noFill/>
-          <a:ln>
-            <a:noFill/>
-          </a:ln>
-        </p:spPr>
-        <p:txBody>
-          <a:bodyPr anchorCtr="0" anchor="ctr" bIns="45700" lIns="91425" spcFirstLastPara="1" rIns="91425" wrap="square" tIns="45700">
-            <a:noAutofit/>
-          </a:bodyPr>
-          <a:lstStyle/>
-          <a:p>
-            <a:pPr indent="0" lvl="0" marL="0" marR="0" rtl="0" algn="l">
-              <a:spcBef>
-                <a:spcPts val="0"/>
-              </a:spcBef>
-              <a:spcAft>
-                <a:spcPts val="0"/>
-              </a:spcAft>
-              <a:buClr>
-                <a:srgbClr val="B0BEC5"/>
-              </a:buClr>
-              <a:buSzPts val="1200"/>
-              <a:buFont typeface="Calibri"/>
-              <a:buNone/>
-            </a:pPr>
-            <a:r>
-              <a:rPr b="0" i="0" lang="en-US" sz="1200" u="none" cap="none" strike="noStrike">
-                <a:solidFill>
-                  <a:srgbClr val="B0BEC5"/>
-                </a:solidFill>
-                <a:latin typeface="Calibri"/>
-                <a:ea typeface="Calibri"/>
-                <a:cs typeface="Calibri"/>
-                <a:sym typeface="Calibri"/>
-              </a:rPr>
-              <a:t>brži od </a:t>
-            </a:r>
-            <a:r>
-              <a:rPr lang="en-US" sz="1200">
-                <a:solidFill>
-                  <a:srgbClr val="B0BEC5"/>
-                </a:solidFill>
-                <a:latin typeface="Calibri"/>
-                <a:ea typeface="Calibri"/>
-                <a:cs typeface="Calibri"/>
-                <a:sym typeface="Calibri"/>
-              </a:rPr>
-              <a:t>minimax algoritma</a:t>
-            </a:r>
-            <a:endParaRPr b="0" i="0" sz="1200" u="none" cap="none" strike="noStrike">
-              <a:solidFill>
-                <a:schemeClr val="dk1"/>
-              </a:solidFill>
-              <a:latin typeface="Calibri"/>
-              <a:ea typeface="Calibri"/>
-              <a:cs typeface="Calibri"/>
-              <a:sym typeface="Calibri"/>
-            </a:endParaRPr>
-          </a:p>
-          <a:p>
-            <a:pPr indent="0" lvl="0" marL="0" marR="0" rtl="0" algn="l">
-              <a:spcBef>
-                <a:spcPts val="0"/>
-              </a:spcBef>
-              <a:spcAft>
-                <a:spcPts val="0"/>
-              </a:spcAft>
-              <a:buClr>
-                <a:srgbClr val="B0BEC5"/>
-              </a:buClr>
-              <a:buSzPts val="1200"/>
-              <a:buFont typeface="Calibri"/>
-              <a:buNone/>
-            </a:pPr>
-            <a:r>
-              <a:rPr b="0" i="0" lang="en-US" sz="1200" u="none" cap="none" strike="noStrike">
-                <a:solidFill>
-                  <a:srgbClr val="B0BEC5"/>
-                </a:solidFill>
-                <a:latin typeface="Calibri"/>
-                <a:ea typeface="Calibri"/>
-                <a:cs typeface="Calibri"/>
-                <a:sym typeface="Calibri"/>
-              </a:rPr>
-              <a:t>na teškom nivou</a:t>
-            </a:r>
-            <a:endParaRPr b="0" i="0" sz="1200" u="none" cap="none" strike="noStrike">
-              <a:solidFill>
-                <a:schemeClr val="dk1"/>
-              </a:solidFill>
-              <a:latin typeface="Calibri"/>
-              <a:ea typeface="Calibri"/>
-              <a:cs typeface="Calibri"/>
-              <a:sym typeface="Calibri"/>
-            </a:endParaRPr>
-          </a:p>
-        </p:txBody>
-      </p:sp>
-      <p:sp>
-        <p:nvSpPr>
-          <p:cNvPr id="318" name="Google Shape;318;p7"/>
-          <p:cNvSpPr/>
-          <p:nvPr/>
-        </p:nvSpPr>
-        <p:spPr>
-          <a:xfrm>
-            <a:off x="5532120" y="2377440"/>
-            <a:ext cx="3383280" cy="1234440"/>
-          </a:xfrm>
-          <a:prstGeom prst="rect">
-            <a:avLst/>
-          </a:prstGeom>
-          <a:solidFill>
-            <a:srgbClr val="1E2A4A"/>
-          </a:solidFill>
-          <a:ln cap="flat" cmpd="sng" w="19050">
-            <a:solidFill>
-              <a:srgbClr val="E94560"/>
-            </a:solidFill>
-            <a:prstDash val="solid"/>
-            <a:round/>
-            <a:headEnd len="sm" w="sm" type="none"/>
-            <a:tailEnd len="sm" w="sm" type="none"/>
-          </a:ln>
-        </p:spPr>
-        <p:txBody>
-          <a:bodyPr anchorCtr="0" anchor="ctr" bIns="91425" lIns="91425" spcFirstLastPara="1" rIns="91425" wrap="square" tIns="91425">
-            <a:noAutofit/>
-          </a:bodyPr>
-          <a:lstStyle/>
-          <a:p>
-            <a:pPr indent="0" lvl="0" marL="0" rtl="0" algn="l">
-              <a:spcBef>
-                <a:spcPts val="0"/>
-              </a:spcBef>
-              <a:spcAft>
-                <a:spcPts val="0"/>
-              </a:spcAft>
-              <a:buNone/>
-            </a:pPr>
-            <a:r>
-              <a:t/>
-            </a:r>
-            <a:endParaRPr/>
-          </a:p>
-        </p:txBody>
-      </p:sp>
-      <p:sp>
-        <p:nvSpPr>
-          <p:cNvPr id="319" name="Google Shape;319;p7"/>
-          <p:cNvSpPr/>
-          <p:nvPr/>
-        </p:nvSpPr>
-        <p:spPr>
-          <a:xfrm>
-            <a:off x="5577840" y="2468880"/>
-            <a:ext cx="1097280" cy="1005840"/>
-          </a:xfrm>
-          <a:prstGeom prst="rect">
-            <a:avLst/>
-          </a:prstGeom>
-          <a:noFill/>
-          <a:ln>
-            <a:noFill/>
-          </a:ln>
-        </p:spPr>
-        <p:txBody>
-          <a:bodyPr anchorCtr="0" anchor="ctr" bIns="45700" lIns="91425" spcFirstLastPara="1" rIns="91425" wrap="square" tIns="45700">
-            <a:noAutofit/>
-          </a:bodyPr>
-          <a:lstStyle/>
-          <a:p>
-            <a:pPr indent="0" lvl="0" marL="0" marR="0" rtl="0" algn="ctr">
-              <a:spcBef>
-                <a:spcPts val="0"/>
-              </a:spcBef>
-              <a:spcAft>
-                <a:spcPts val="0"/>
-              </a:spcAft>
-              <a:buClr>
-                <a:srgbClr val="E94560"/>
-              </a:buClr>
-              <a:buSzPts val="3600"/>
-              <a:buFont typeface="Calibri"/>
-              <a:buNone/>
-            </a:pPr>
-            <a:r>
-              <a:rPr b="1" i="0" lang="en-US" sz="3600" u="none" cap="none" strike="noStrike">
-                <a:solidFill>
-                  <a:srgbClr val="E94560"/>
-                </a:solidFill>
-                <a:latin typeface="Calibri"/>
-                <a:ea typeface="Calibri"/>
-                <a:cs typeface="Calibri"/>
-                <a:sym typeface="Calibri"/>
-              </a:rPr>
-              <a:t>6×</a:t>
-            </a:r>
-            <a:endParaRPr b="0" i="0" sz="3600" u="none" cap="none" strike="noStrike">
-              <a:solidFill>
-                <a:schemeClr val="dk1"/>
-              </a:solidFill>
-              <a:latin typeface="Calibri"/>
-              <a:ea typeface="Calibri"/>
-              <a:cs typeface="Calibri"/>
-              <a:sym typeface="Calibri"/>
-            </a:endParaRPr>
-          </a:p>
-        </p:txBody>
-      </p:sp>
-      <p:sp>
-        <p:nvSpPr>
-          <p:cNvPr id="320" name="Google Shape;320;p7"/>
-          <p:cNvSpPr/>
-          <p:nvPr/>
-        </p:nvSpPr>
-        <p:spPr>
-          <a:xfrm>
-            <a:off x="6720840" y="2606040"/>
-            <a:ext cx="2103120" cy="777240"/>
-          </a:xfrm>
-          <a:prstGeom prst="rect">
-            <a:avLst/>
-          </a:prstGeom>
-          <a:noFill/>
-          <a:ln>
-            <a:noFill/>
-          </a:ln>
-        </p:spPr>
-        <p:txBody>
-          <a:bodyPr anchorCtr="0" anchor="ctr" bIns="45700" lIns="91425" spcFirstLastPara="1" rIns="91425" wrap="square" tIns="45700">
-            <a:noAutofit/>
-          </a:bodyPr>
-          <a:lstStyle/>
-          <a:p>
-            <a:pPr indent="0" lvl="0" marL="0" marR="0" rtl="0" algn="l">
-              <a:spcBef>
-                <a:spcPts val="0"/>
-              </a:spcBef>
-              <a:spcAft>
-                <a:spcPts val="0"/>
-              </a:spcAft>
-              <a:buClr>
-                <a:srgbClr val="B0BEC5"/>
-              </a:buClr>
-              <a:buSzPts val="1200"/>
-              <a:buFont typeface="Calibri"/>
-              <a:buNone/>
-            </a:pPr>
-            <a:r>
-              <a:rPr b="0" i="0" lang="en-US" sz="1200" u="none" cap="none" strike="noStrike">
-                <a:solidFill>
-                  <a:srgbClr val="B0BEC5"/>
-                </a:solidFill>
-                <a:latin typeface="Calibri"/>
-                <a:ea typeface="Calibri"/>
-                <a:cs typeface="Calibri"/>
-                <a:sym typeface="Calibri"/>
-              </a:rPr>
-              <a:t>više čvorova po</a:t>
-            </a:r>
-            <a:endParaRPr b="0" i="0" sz="1200" u="none" cap="none" strike="noStrike">
-              <a:solidFill>
-                <a:schemeClr val="dk1"/>
-              </a:solidFill>
-              <a:latin typeface="Calibri"/>
-              <a:ea typeface="Calibri"/>
-              <a:cs typeface="Calibri"/>
-              <a:sym typeface="Calibri"/>
-            </a:endParaRPr>
-          </a:p>
-          <a:p>
-            <a:pPr indent="0" lvl="0" marL="0" marR="0" rtl="0" algn="l">
-              <a:spcBef>
-                <a:spcPts val="0"/>
-              </a:spcBef>
-              <a:spcAft>
-                <a:spcPts val="0"/>
-              </a:spcAft>
-              <a:buClr>
-                <a:srgbClr val="B0BEC5"/>
-              </a:buClr>
-              <a:buSzPts val="1200"/>
-              <a:buFont typeface="Calibri"/>
-              <a:buNone/>
-            </a:pPr>
-            <a:r>
-              <a:rPr b="0" i="0" lang="en-US" sz="1200" u="none" cap="none" strike="noStrike">
-                <a:solidFill>
-                  <a:srgbClr val="B0BEC5"/>
-                </a:solidFill>
-                <a:latin typeface="Calibri"/>
-                <a:ea typeface="Calibri"/>
-                <a:cs typeface="Calibri"/>
-                <a:sym typeface="Calibri"/>
-              </a:rPr>
-              <a:t>dodatnom nivou dubine za Minimax algoritam</a:t>
-            </a:r>
-            <a:endParaRPr b="0" i="0" sz="1200" u="none" cap="none" strike="noStrike">
-              <a:solidFill>
-                <a:schemeClr val="dk1"/>
-              </a:solidFill>
-              <a:latin typeface="Calibri"/>
-              <a:ea typeface="Calibri"/>
-              <a:cs typeface="Calibri"/>
-              <a:sym typeface="Calibri"/>
-            </a:endParaRPr>
-          </a:p>
-        </p:txBody>
-      </p:sp>
-      <p:sp>
-        <p:nvSpPr>
-          <p:cNvPr id="321" name="Google Shape;321;p7"/>
-          <p:cNvSpPr/>
-          <p:nvPr/>
-        </p:nvSpPr>
-        <p:spPr>
-          <a:xfrm>
-            <a:off x="5532120" y="3794760"/>
-            <a:ext cx="3383280" cy="1234440"/>
-          </a:xfrm>
-          <a:prstGeom prst="rect">
-            <a:avLst/>
-          </a:prstGeom>
-          <a:solidFill>
-            <a:srgbClr val="1E2A4A"/>
-          </a:solidFill>
-          <a:ln cap="flat" cmpd="sng" w="19050">
-            <a:solidFill>
-              <a:srgbClr val="4A90D9"/>
-            </a:solidFill>
-            <a:prstDash val="solid"/>
-            <a:round/>
-            <a:headEnd len="sm" w="sm" type="none"/>
-            <a:tailEnd len="sm" w="sm" type="none"/>
-          </a:ln>
-        </p:spPr>
-        <p:txBody>
-          <a:bodyPr anchorCtr="0" anchor="ctr" bIns="91425" lIns="91425" spcFirstLastPara="1" rIns="91425" wrap="square" tIns="91425">
-            <a:noAutofit/>
-          </a:bodyPr>
-          <a:lstStyle/>
-          <a:p>
-            <a:pPr indent="0" lvl="0" marL="0" rtl="0" algn="l">
-              <a:spcBef>
-                <a:spcPts val="0"/>
-              </a:spcBef>
-              <a:spcAft>
-                <a:spcPts val="0"/>
-              </a:spcAft>
-              <a:buNone/>
-            </a:pPr>
-            <a:r>
-              <a:t/>
-            </a:r>
-            <a:endParaRPr/>
-          </a:p>
-        </p:txBody>
-      </p:sp>
-      <p:sp>
-        <p:nvSpPr>
-          <p:cNvPr id="322" name="Google Shape;322;p7"/>
-          <p:cNvSpPr/>
-          <p:nvPr/>
-        </p:nvSpPr>
-        <p:spPr>
-          <a:xfrm>
-            <a:off x="5577840" y="3886200"/>
-            <a:ext cx="1097280" cy="1005840"/>
-          </a:xfrm>
-          <a:prstGeom prst="rect">
-            <a:avLst/>
-          </a:prstGeom>
-          <a:noFill/>
-          <a:ln>
-            <a:noFill/>
-          </a:ln>
-        </p:spPr>
-        <p:txBody>
-          <a:bodyPr anchorCtr="0" anchor="ctr" bIns="45700" lIns="91425" spcFirstLastPara="1" rIns="91425" wrap="square" tIns="45700">
-            <a:noAutofit/>
-          </a:bodyPr>
-          <a:lstStyle/>
-          <a:p>
-            <a:pPr indent="0" lvl="0" marL="0" marR="0" rtl="0" algn="ctr">
-              <a:spcBef>
-                <a:spcPts val="0"/>
-              </a:spcBef>
-              <a:spcAft>
-                <a:spcPts val="0"/>
-              </a:spcAft>
-              <a:buClr>
-                <a:srgbClr val="4A90D9"/>
-              </a:buClr>
-              <a:buSzPts val="3600"/>
-              <a:buFont typeface="Calibri"/>
-              <a:buNone/>
-            </a:pPr>
-            <a:r>
-              <a:rPr b="1" lang="en-US" sz="3600">
-                <a:solidFill>
-                  <a:srgbClr val="4A90D9"/>
-                </a:solidFill>
-                <a:latin typeface="Calibri"/>
-                <a:ea typeface="Calibri"/>
-                <a:cs typeface="Calibri"/>
-                <a:sym typeface="Calibri"/>
-              </a:rPr>
-              <a:t>🕙</a:t>
-            </a:r>
-            <a:endParaRPr b="0" i="0" sz="3600" u="none" cap="none" strike="noStrike">
-              <a:solidFill>
-                <a:schemeClr val="dk1"/>
-              </a:solidFill>
-              <a:latin typeface="Calibri"/>
-              <a:ea typeface="Calibri"/>
-              <a:cs typeface="Calibri"/>
-              <a:sym typeface="Calibri"/>
-            </a:endParaRPr>
-          </a:p>
-        </p:txBody>
-      </p:sp>
-      <p:sp>
-        <p:nvSpPr>
-          <p:cNvPr id="323" name="Google Shape;323;p7"/>
-          <p:cNvSpPr/>
-          <p:nvPr/>
-        </p:nvSpPr>
-        <p:spPr>
-          <a:xfrm>
-            <a:off x="6720849" y="4023350"/>
-            <a:ext cx="1874400" cy="777300"/>
-          </a:xfrm>
-          <a:prstGeom prst="rect">
-            <a:avLst/>
-          </a:prstGeom>
-          <a:noFill/>
-          <a:ln>
-            <a:noFill/>
-          </a:ln>
-        </p:spPr>
-        <p:txBody>
-          <a:bodyPr anchorCtr="0" anchor="ctr" bIns="45700" lIns="91425" spcFirstLastPara="1" rIns="91425" wrap="square" tIns="45700">
-            <a:noAutofit/>
-          </a:bodyPr>
-          <a:lstStyle/>
-          <a:p>
-            <a:pPr indent="0" lvl="0" marL="0" marR="0" rtl="0" algn="l">
-              <a:spcBef>
-                <a:spcPts val="0"/>
-              </a:spcBef>
-              <a:spcAft>
-                <a:spcPts val="0"/>
-              </a:spcAft>
-              <a:buClr>
-                <a:srgbClr val="B0BEC5"/>
-              </a:buClr>
-              <a:buSzPts val="1200"/>
-              <a:buFont typeface="Calibri"/>
-              <a:buNone/>
-            </a:pPr>
-            <a:r>
-              <a:rPr lang="en-US" sz="1200">
-                <a:solidFill>
-                  <a:srgbClr val="B0BEC5"/>
-                </a:solidFill>
-                <a:latin typeface="Calibri"/>
-                <a:ea typeface="Calibri"/>
-                <a:cs typeface="Calibri"/>
-                <a:sym typeface="Calibri"/>
-              </a:rPr>
-              <a:t>prvi potezi </a:t>
-            </a:r>
-            <a:r>
-              <a:rPr lang="en-US" sz="1200">
-                <a:solidFill>
-                  <a:srgbClr val="B0BEC5"/>
-                </a:solidFill>
-                <a:latin typeface="Calibri"/>
-                <a:ea typeface="Calibri"/>
-                <a:cs typeface="Calibri"/>
-                <a:sym typeface="Calibri"/>
-              </a:rPr>
-              <a:t>magenta</a:t>
-            </a:r>
-            <a:r>
-              <a:rPr lang="en-US" sz="1200">
-                <a:solidFill>
-                  <a:srgbClr val="B0BEC5"/>
-                </a:solidFill>
-                <a:latin typeface="Calibri"/>
-                <a:ea typeface="Calibri"/>
-                <a:cs typeface="Calibri"/>
-                <a:sym typeface="Calibri"/>
-              </a:rPr>
-              <a:t> su uvek i najsporiji</a:t>
-            </a:r>
-            <a:endParaRPr b="0" i="0" sz="1200" u="none" cap="none" strike="noStrike">
-              <a:solidFill>
-                <a:schemeClr val="dk1"/>
-              </a:solidFill>
-              <a:latin typeface="Calibri"/>
-              <a:ea typeface="Calibri"/>
-              <a:cs typeface="Calibri"/>
-              <a:sym typeface="Calibri"/>
-            </a:endParaRPr>
-          </a:p>
-        </p:txBody>
-      </p:sp>
       <p:pic>
         <p:nvPicPr>
-          <p:cNvPr id="324" name="Google Shape;324;p7"/>
+          <p:cNvPr id="315" name="Google Shape;315;p7"/>
           <p:cNvPicPr preferRelativeResize="0"/>
           <p:nvPr/>
         </p:nvPicPr>
@@ -21409,8 +20762,8 @@
         </p:blipFill>
         <p:spPr>
           <a:xfrm>
-            <a:off x="141700" y="1403608"/>
-            <a:ext cx="5227320" cy="3136392"/>
+            <a:off x="1231875" y="808773"/>
+            <a:ext cx="6680240" cy="4008150"/>
           </a:xfrm>
           <a:prstGeom prst="rect">
             <a:avLst/>
